--- a/report/pitch/Digital_Twin_Project2_Executive_Pitch.pptx
+++ b/report/pitch/Digital_Twin_Project2_Executive_Pitch.pptx
@@ -1144,7 +1144,7 @@
           <a:lstStyle/>
           <a:p>
             <a:r>
-              <a:t>This is the slide I'd want to see if I were buying. ML is not uniformly better than rules — it beats thresholds on cumulative wear and loses to a thermostat on a fault with a direct physical precursor. We ship both.</a:t>
+              <a:t>This is the slide I'd want to see if I were buying. Our first model was blind to one failure mode. The cause was starvation, not tuning — it had two examples. A model that cannot see something is usually being starved of it. We fixed the data, and we keep the physics threshold as an independent backstop.</a:t>
             </a:r>
           </a:p>
         </p:txBody>
@@ -1214,7 +1214,7 @@
           <a:lstStyle/>
           <a:p>
             <a:r>
-              <a:t>The room the model covers worst is the room where failure costs most. We found it, published it, and mitigate it with the thermal guard — but keep calendar servicing on that unit. We are not asking you to trust it there.</a:t>
+              <a:t>An earlier version had a 100% false-negative rate on the wet lab — the room where an outage costs most. We found it, fixed its actual cause, and publish both states. What remains is a precision gap in the teaching lab, which is disruptive rather than dangerous. That placement is luck, not design, which is why the audit repeats.</a:t>
             </a:r>
           </a:p>
         </p:txBody>
@@ -6907,7 +6907,7 @@
                 </a:solidFill>
                 <a:latin typeface="Calibri"/>
               </a:rPr>
-              <a:t>PR-AUC  0.92</a:t>
+              <a:t>PR-AUC  0.96</a:t>
             </a:r>
           </a:p>
           <a:p>
@@ -6923,7 +6923,7 @@
                 </a:solidFill>
                 <a:latin typeface="Calibri"/>
               </a:rPr>
-              <a:t>Recall  0.95</a:t>
+              <a:t>Recall  0.99</a:t>
             </a:r>
           </a:p>
           <a:p>
@@ -6939,7 +6939,7 @@
                 </a:solidFill>
                 <a:latin typeface="Calibri"/>
               </a:rPr>
-              <a:t>Precision  0.66</a:t>
+              <a:t>Precision  0.71</a:t>
             </a:r>
           </a:p>
         </p:txBody>
@@ -7051,7 +7051,7 @@
                 </a:solidFill>
                 <a:latin typeface="Calibri"/>
               </a:rPr>
-              <a:t>LIMITATIONS</a:t>
+              <a:t>WHAT WENT WRONG FIRST</a:t>
             </a:r>
           </a:p>
         </p:txBody>
@@ -7090,7 +7090,7 @@
                 </a:solidFill>
                 <a:latin typeface="Calibri"/>
               </a:rPr>
-              <a:t>What the model cannot do</a:t>
+              <a:t>One failure mode was invisible — and why</a:t>
             </a:r>
           </a:p>
         </p:txBody>
@@ -7112,7 +7112,7 @@
         <p:spPr>
           <a:xfrm>
             <a:off x="822960" y="1737360"/>
-            <a:ext cx="6766560" cy="3192637"/>
+            <a:ext cx="6766560" cy="2861549"/>
           </a:xfrm>
           <a:prstGeom prst="rect">
             <a:avLst/>
@@ -7153,7 +7153,7 @@
                 </a:solidFill>
                 <a:latin typeface="Calibri"/>
               </a:rPr>
-              <a:t>Blind to heat-dissipation</a:t>
+              <a:t>Heat-dissipation recall:</a:t>
             </a:r>
           </a:p>
           <a:p>
@@ -7169,7 +7169,7 @@
                 </a:solidFill>
                 <a:latin typeface="Calibri"/>
               </a:rPr>
-              <a:t>failure on its own.</a:t>
+              <a:t>0.00 → 0.95</a:t>
             </a:r>
           </a:p>
         </p:txBody>
@@ -7183,7 +7183,7 @@
         <p:spPr>
           <a:xfrm>
             <a:off x="7863840" y="3108960"/>
-            <a:ext cx="3931920" cy="2011680"/>
+            <a:ext cx="3931920" cy="2377440"/>
           </a:xfrm>
           <a:prstGeom prst="rect">
             <a:avLst/>
@@ -7208,7 +7208,7 @@
                 </a:solidFill>
                 <a:latin typeface="Calibri"/>
               </a:rPr>
-              <a:t>About two such events existed in the</a:t>
+              <a:t>The first model missed that mode entirely.</a:t>
             </a:r>
           </a:p>
           <a:p>
@@ -7224,7 +7224,7 @@
                 </a:solidFill>
                 <a:latin typeface="Calibri"/>
               </a:rPr>
-              <a:t>training data. No model learns from two.</a:t>
+              <a:t>It had seen about two examples of it.</a:t>
             </a:r>
           </a:p>
           <a:p>
@@ -7247,7 +7247,7 @@
                 </a:solidFill>
                 <a:latin typeface="Calibri"/>
               </a:rPr>
-              <a:t>A physics threshold covers it — we ship</a:t>
+              <a:t>The fix was to the DATA, not the model:</a:t>
             </a:r>
           </a:p>
           <a:p>
@@ -7263,7 +7263,46 @@
                 </a:solidFill>
                 <a:latin typeface="Calibri"/>
               </a:rPr>
-              <a:t>both, and report them separately.</a:t>
+              <a:t>six identical units were replaced by six</a:t>
+            </a:r>
+          </a:p>
+          <a:p>
+            <a:pPr>
+              <a:lnSpc>
+                <a:spcPct val="115000"/>
+              </a:lnSpc>
+            </a:pPr>
+            <a:r>
+              <a:rPr sz="1400" b="0">
+                <a:solidFill>
+                  <a:srgbClr val="475569"/>
+                </a:solidFill>
+                <a:latin typeface="Calibri"/>
+              </a:rPr>
+              <a:t>with realistic, different wear characters.</a:t>
+            </a:r>
+          </a:p>
+          <a:p>
+            <a:pPr>
+              <a:lnSpc>
+                <a:spcPct val="115000"/>
+              </a:lnSpc>
+            </a:pPr>
+          </a:p>
+          <a:p>
+            <a:pPr>
+              <a:lnSpc>
+                <a:spcPct val="115000"/>
+              </a:lnSpc>
+            </a:pPr>
+            <a:r>
+              <a:rPr sz="1400" b="0">
+                <a:solidFill>
+                  <a:srgbClr val="475569"/>
+                </a:solidFill>
+                <a:latin typeface="Calibri"/>
+              </a:rPr>
+              <a:t>A physics threshold still backs it up.</a:t>
             </a:r>
           </a:p>
         </p:txBody>
@@ -7359,7 +7398,7 @@
                 </a:solidFill>
                 <a:latin typeface="Calibri"/>
               </a:rPr>
-              <a:t>Weakest where it matters most</a:t>
+              <a:t>Detection is even — precision is not</a:t>
             </a:r>
           </a:p>
         </p:txBody>
@@ -7418,11 +7457,11 @@
             <a:r>
               <a:rPr sz="2000" b="1">
                 <a:solidFill>
-                  <a:srgbClr val="B45309"/>
+                  <a:srgbClr val="15803D"/>
                 </a:solidFill>
                 <a:latin typeface="Calibri"/>
               </a:rPr>
-              <a:t>Wet Lab A:</a:t>
+              <a:t>Recall 0.95–1.00</a:t>
             </a:r>
           </a:p>
           <a:p>
@@ -7434,11 +7473,11 @@
             <a:r>
               <a:rPr sz="2000" b="1">
                 <a:solidFill>
-                  <a:srgbClr val="B45309"/>
+                  <a:srgbClr val="15803D"/>
                 </a:solidFill>
                 <a:latin typeface="Calibri"/>
               </a:rPr>
-              <a:t>100 % of failures missed</a:t>
+              <a:t>in every room</a:t>
             </a:r>
           </a:p>
         </p:txBody>
@@ -7477,7 +7516,7 @@
                 </a:solidFill>
                 <a:latin typeface="Calibri"/>
               </a:rPr>
-              <a:t>Not because the model knows which room it</a:t>
+              <a:t>Room identity is excluded from the model</a:t>
             </a:r>
           </a:p>
           <a:p>
@@ -7493,15 +7532,8 @@
                 </a:solidFill>
                 <a:latin typeface="Calibri"/>
               </a:rPr>
-              <a:t>is looking at — room identity is excluded.</a:t>
-            </a:r>
-          </a:p>
-          <a:p>
-            <a:pPr>
-              <a:lnSpc>
-                <a:spcPct val="115000"/>
-              </a:lnSpc>
-            </a:pPr>
+              <a:t>by construction, so it cannot learn a</a:t>
+            </a:r>
           </a:p>
           <a:p>
             <a:pPr>
@@ -7516,8 +7548,15 @@
                 </a:solidFill>
                 <a:latin typeface="Calibri"/>
               </a:rPr>
-              <a:t>That room is serviced so well its only</a:t>
-            </a:r>
+              <a:t>per-room prior.</a:t>
+            </a:r>
+          </a:p>
+          <a:p>
+            <a:pPr>
+              <a:lnSpc>
+                <a:spcPct val="115000"/>
+              </a:lnSpc>
+            </a:pPr>
           </a:p>
           <a:p>
             <a:pPr>
@@ -7532,15 +7571,8 @@
                 </a:solidFill>
                 <a:latin typeface="Calibri"/>
               </a:rPr>
-              <a:t>failures are the mode the model can't see.</a:t>
-            </a:r>
-          </a:p>
-          <a:p>
-            <a:pPr>
-              <a:lnSpc>
-                <a:spcPct val="115000"/>
-              </a:lnSpc>
-            </a:pPr>
+              <a:t>Teaching Lab C remains weakest:</a:t>
+            </a:r>
           </a:p>
           <a:p>
             <a:pPr>
@@ -7555,7 +7587,46 @@
                 </a:solidFill>
                 <a:latin typeface="Calibri"/>
               </a:rPr>
-              <a:t>Keep calendar servicing there.</a:t>
+              <a:t>precision 0.46 — about half its work</a:t>
+            </a:r>
+          </a:p>
+          <a:p>
+            <a:pPr>
+              <a:lnSpc>
+                <a:spcPct val="115000"/>
+              </a:lnSpc>
+            </a:pPr>
+            <a:r>
+              <a:rPr sz="1400" b="0">
+                <a:solidFill>
+                  <a:srgbClr val="475569"/>
+                </a:solidFill>
+                <a:latin typeface="Calibri"/>
+              </a:rPr>
+              <a:t>orders are unnecessary.</a:t>
+            </a:r>
+          </a:p>
+          <a:p>
+            <a:pPr>
+              <a:lnSpc>
+                <a:spcPct val="115000"/>
+              </a:lnSpc>
+            </a:pPr>
+          </a:p>
+          <a:p>
+            <a:pPr>
+              <a:lnSpc>
+                <a:spcPct val="115000"/>
+              </a:lnSpc>
+            </a:pPr>
+            <a:r>
+              <a:rPr sz="1400" b="0">
+                <a:solidFill>
+                  <a:srgbClr val="475569"/>
+                </a:solidFill>
+                <a:latin typeface="Calibri"/>
+              </a:rPr>
+              <a:t>We re-run this audit after every retrain.</a:t>
             </a:r>
           </a:p>
         </p:txBody>
@@ -8013,7 +8084,7 @@
                         <a:rPr sz="1700" b="0">
                           <a:latin typeface="Calibri"/>
                         </a:rPr>
-                        <a:t>€2,900 / year</a:t>
+                        <a:t>€3,100 / year</a:t>
                       </a:r>
                     </a:p>
                   </a:txBody>
@@ -8045,7 +8116,7 @@
                         <a:rPr sz="1700" b="0">
                           <a:latin typeface="Calibri"/>
                         </a:rPr>
-                        <a:t>5.9 years</a:t>
+                        <a:t>5.5 years</a:t>
                       </a:r>
                     </a:p>
                   </a:txBody>
@@ -8077,7 +8148,7 @@
                         <a:rPr sz="1700" b="0">
                           <a:latin typeface="Calibri"/>
                         </a:rPr>
-                        <a:t>−€5,420</a:t>
+                        <a:t>−€4,622</a:t>
                       </a:r>
                     </a:p>
                   </a:txBody>

--- a/report/pitch/Digital_Twin_Project2_Executive_Pitch.pptx
+++ b/report/pitch/Digital_Twin_Project2_Executive_Pitch.pptx
@@ -6907,7 +6907,7 @@
                 </a:solidFill>
                 <a:latin typeface="Calibri"/>
               </a:rPr>
-              <a:t>PR-AUC  0.96</a:t>
+              <a:t>PR-AUC  0.95</a:t>
             </a:r>
           </a:p>
           <a:p>
@@ -6923,7 +6923,7 @@
                 </a:solidFill>
                 <a:latin typeface="Calibri"/>
               </a:rPr>
-              <a:t>Recall  0.99</a:t>
+              <a:t>Recall  0.97</a:t>
             </a:r>
           </a:p>
           <a:p>
@@ -6939,7 +6939,7 @@
                 </a:solidFill>
                 <a:latin typeface="Calibri"/>
               </a:rPr>
-              <a:t>Precision  0.71</a:t>
+              <a:t>Precision  0.73</a:t>
             </a:r>
           </a:p>
         </p:txBody>
@@ -8084,7 +8084,7 @@
                         <a:rPr sz="1700" b="0">
                           <a:latin typeface="Calibri"/>
                         </a:rPr>
-                        <a:t>€3,100 / year</a:t>
+                        <a:t>€3,000 / year</a:t>
                       </a:r>
                     </a:p>
                   </a:txBody>
@@ -8116,7 +8116,7 @@
                         <a:rPr sz="1700" b="0">
                           <a:latin typeface="Calibri"/>
                         </a:rPr>
-                        <a:t>5.5 years</a:t>
+                        <a:t>5.7 years</a:t>
                       </a:r>
                     </a:p>
                   </a:txBody>
@@ -8148,7 +8148,7 @@
                         <a:rPr sz="1700" b="0">
                           <a:latin typeface="Calibri"/>
                         </a:rPr>
-                        <a:t>−€4,622</a:t>
+                        <a:t>−€5,021</a:t>
                       </a:r>
                     </a:p>
                   </a:txBody>

--- a/report/pitch/Digital_Twin_Project2_Executive_Pitch.pptx
+++ b/report/pitch/Digital_Twin_Project2_Executive_Pitch.pptx
@@ -7112,7 +7112,7 @@
         <p:spPr>
           <a:xfrm>
             <a:off x="822960" y="1737360"/>
-            <a:ext cx="6766560" cy="2861549"/>
+            <a:ext cx="6766560" cy="3237314"/>
           </a:xfrm>
           <a:prstGeom prst="rect">
             <a:avLst/>
@@ -7420,7 +7420,7 @@
         <p:spPr>
           <a:xfrm>
             <a:off x="822960" y="1737360"/>
-            <a:ext cx="6766560" cy="3163402"/>
+            <a:ext cx="6766560" cy="2964803"/>
           </a:xfrm>
           <a:prstGeom prst="rect">
             <a:avLst/>
